--- a/CourseSphere Presentation.pptx
+++ b/CourseSphere Presentation.pptx
@@ -110,6 +110,11 @@
       </a:defRPr>
     </a:lvl9pPr>
   </p:defaultTextStyle>
+  <p:extLst>
+    <p:ext uri="{EFAFB233-063F-42B5-8137-9DF3F51BA10A}">
+      <p15:sldGuideLst xmlns:p15="http://schemas.microsoft.com/office/powerpoint/2012/main"/>
+    </p:ext>
+  </p:extLst>
 </p:presentation>
 </file>
 
@@ -262,7 +267,7 @@
           <a:p>
             <a:fld id="{34493D1F-1498-445D-978C-F330D453FA31}" type="datetimeFigureOut">
               <a:rPr lang="en-AE" smtClean="0"/>
-              <a:t>05/02/2026</a:t>
+              <a:t>06/02/2026</a:t>
             </a:fld>
             <a:endParaRPr lang="en-AE"/>
           </a:p>
@@ -462,7 +467,7 @@
           <a:p>
             <a:fld id="{34493D1F-1498-445D-978C-F330D453FA31}" type="datetimeFigureOut">
               <a:rPr lang="en-AE" smtClean="0"/>
-              <a:t>05/02/2026</a:t>
+              <a:t>06/02/2026</a:t>
             </a:fld>
             <a:endParaRPr lang="en-AE"/>
           </a:p>
@@ -672,7 +677,7 @@
           <a:p>
             <a:fld id="{34493D1F-1498-445D-978C-F330D453FA31}" type="datetimeFigureOut">
               <a:rPr lang="en-AE" smtClean="0"/>
-              <a:t>05/02/2026</a:t>
+              <a:t>06/02/2026</a:t>
             </a:fld>
             <a:endParaRPr lang="en-AE"/>
           </a:p>
@@ -872,7 +877,7 @@
           <a:p>
             <a:fld id="{34493D1F-1498-445D-978C-F330D453FA31}" type="datetimeFigureOut">
               <a:rPr lang="en-AE" smtClean="0"/>
-              <a:t>05/02/2026</a:t>
+              <a:t>06/02/2026</a:t>
             </a:fld>
             <a:endParaRPr lang="en-AE"/>
           </a:p>
@@ -1148,7 +1153,7 @@
           <a:p>
             <a:fld id="{34493D1F-1498-445D-978C-F330D453FA31}" type="datetimeFigureOut">
               <a:rPr lang="en-AE" smtClean="0"/>
-              <a:t>05/02/2026</a:t>
+              <a:t>06/02/2026</a:t>
             </a:fld>
             <a:endParaRPr lang="en-AE"/>
           </a:p>
@@ -1416,7 +1421,7 @@
           <a:p>
             <a:fld id="{34493D1F-1498-445D-978C-F330D453FA31}" type="datetimeFigureOut">
               <a:rPr lang="en-AE" smtClean="0"/>
-              <a:t>05/02/2026</a:t>
+              <a:t>06/02/2026</a:t>
             </a:fld>
             <a:endParaRPr lang="en-AE"/>
           </a:p>
@@ -1831,7 +1836,7 @@
           <a:p>
             <a:fld id="{34493D1F-1498-445D-978C-F330D453FA31}" type="datetimeFigureOut">
               <a:rPr lang="en-AE" smtClean="0"/>
-              <a:t>05/02/2026</a:t>
+              <a:t>06/02/2026</a:t>
             </a:fld>
             <a:endParaRPr lang="en-AE"/>
           </a:p>
@@ -1973,7 +1978,7 @@
           <a:p>
             <a:fld id="{34493D1F-1498-445D-978C-F330D453FA31}" type="datetimeFigureOut">
               <a:rPr lang="en-AE" smtClean="0"/>
-              <a:t>05/02/2026</a:t>
+              <a:t>06/02/2026</a:t>
             </a:fld>
             <a:endParaRPr lang="en-AE"/>
           </a:p>
@@ -2086,7 +2091,7 @@
           <a:p>
             <a:fld id="{34493D1F-1498-445D-978C-F330D453FA31}" type="datetimeFigureOut">
               <a:rPr lang="en-AE" smtClean="0"/>
-              <a:t>05/02/2026</a:t>
+              <a:t>06/02/2026</a:t>
             </a:fld>
             <a:endParaRPr lang="en-AE"/>
           </a:p>
@@ -2399,7 +2404,7 @@
           <a:p>
             <a:fld id="{34493D1F-1498-445D-978C-F330D453FA31}" type="datetimeFigureOut">
               <a:rPr lang="en-AE" smtClean="0"/>
-              <a:t>05/02/2026</a:t>
+              <a:t>06/02/2026</a:t>
             </a:fld>
             <a:endParaRPr lang="en-AE"/>
           </a:p>
@@ -2688,7 +2693,7 @@
           <a:p>
             <a:fld id="{34493D1F-1498-445D-978C-F330D453FA31}" type="datetimeFigureOut">
               <a:rPr lang="en-AE" smtClean="0"/>
-              <a:t>05/02/2026</a:t>
+              <a:t>06/02/2026</a:t>
             </a:fld>
             <a:endParaRPr lang="en-AE"/>
           </a:p>
@@ -2931,7 +2936,7 @@
           <a:p>
             <a:fld id="{34493D1F-1498-445D-978C-F330D453FA31}" type="datetimeFigureOut">
               <a:rPr lang="en-AE" smtClean="0"/>
-              <a:t>05/02/2026</a:t>
+              <a:t>06/02/2026</a:t>
             </a:fld>
             <a:endParaRPr lang="en-AE"/>
           </a:p>
@@ -3452,7 +3457,14 @@
               <a:rPr lang="en-US" dirty="0"/>
               <a:t>Muhammed Safnas</a:t>
             </a:r>
-            <a:endParaRPr lang="en-AE" dirty="0"/>
+            <a:br>
+              <a:rPr lang="en-AE" dirty="0"/>
+            </a:br>
+            <a:r>
+              <a:rPr lang="en-AE" dirty="0"/>
+              <a:t>Yazan Ghawi</a:t>
+            </a:r>
+            <a:endParaRPr lang="en-US" dirty="0"/>
           </a:p>
         </p:txBody>
       </p:sp>

--- a/CourseSphere Presentation.pptx
+++ b/CourseSphere Presentation.pptx
@@ -3448,21 +3448,21 @@
           <a:p>
             <a:r>
               <a:rPr lang="en-US" dirty="0"/>
-              <a:t>Srivignan Saravanan</a:t>
+              <a:t>Srivignan Saravanan - 421006512</a:t>
             </a:r>
             <a:br>
               <a:rPr lang="en-US" dirty="0"/>
             </a:br>
             <a:r>
               <a:rPr lang="en-US" dirty="0"/>
-              <a:t>Muhammed Safnas</a:t>
+              <a:t>Muhammed Safnas - 751008813</a:t>
             </a:r>
             <a:br>
               <a:rPr lang="en-AE" dirty="0"/>
             </a:br>
             <a:r>
               <a:rPr lang="en-AE" dirty="0"/>
-              <a:t>Yazan Ghawi</a:t>
+              <a:t>Yazan Ghawi - 744000192</a:t>
             </a:r>
             <a:endParaRPr lang="en-US" dirty="0"/>
           </a:p>
